--- a/01-intro.pptx
+++ b/01-intro.pptx
@@ -282,7 +282,7 @@
               <a:rPr lang="en-US" smtClean="0">
                 <a:latin typeface="Segoe UI" pitchFamily="34" charset="0"/>
               </a:rPr>
-              <a:t>11/8/2022 9:40 AM</a:t>
+              <a:t>5/24/26 7:51 PM</a:t>
             </a:fld>
             <a:endParaRPr lang="en-US" dirty="0">
               <a:latin typeface="Segoe UI" pitchFamily="34" charset="0"/>
@@ -579,7 +579,7 @@
           <a:p>
             <a:fld id="{D18B56EA-E28F-4F92-9F16-7A6F2501B303}" type="datetime8">
               <a:rPr lang="en-US" smtClean="0"/>
-              <a:t>11/8/2022 9:40 AM</a:t>
+              <a:t>5/24/26 7:51 PM</a:t>
             </a:fld>
             <a:endParaRPr lang="en-US" dirty="0"/>
           </a:p>
@@ -962,7 +962,7 @@
           <a:p>
             <a:fld id="{D18B56EA-E28F-4F92-9F16-7A6F2501B303}" type="datetime8">
               <a:rPr lang="en-US" smtClean="0"/>
-              <a:t>11/8/2022 9:40 AM</a:t>
+              <a:t>5/24/26 7:51 PM</a:t>
             </a:fld>
             <a:endParaRPr lang="en-US" dirty="0"/>
           </a:p>
@@ -1318,288 +1318,6 @@
             </a:r>
           </a:p>
           <a:p>
-            <a:r>
-              <a:rPr lang="en-US" sz="900" b="0" kern="1200" dirty="0">
-                <a:solidFill>
-                  <a:schemeClr val="tx1"/>
-                </a:solidFill>
-                <a:effectLst/>
-                <a:latin typeface="Segoe UI Light" pitchFamily="34" charset="0"/>
-                <a:ea typeface="+mn-ea"/>
-                <a:cs typeface="+mn-cs"/>
-              </a:rPr>
-              <a:t>- </a:t>
-            </a:r>
-            <a:r>
-              <a:rPr lang="en-US" sz="900" b="1" kern="1200" dirty="0">
-                <a:solidFill>
-                  <a:schemeClr val="tx1"/>
-                </a:solidFill>
-                <a:effectLst/>
-                <a:latin typeface="Segoe UI Light" pitchFamily="34" charset="0"/>
-                <a:ea typeface="+mn-ea"/>
-                <a:cs typeface="+mn-cs"/>
-              </a:rPr>
-              <a:t>**bundle**</a:t>
-            </a:r>
-            <a:r>
-              <a:rPr lang="en-US" sz="900" b="0" kern="1200" dirty="0">
-                <a:solidFill>
-                  <a:schemeClr val="tx1"/>
-                </a:solidFill>
-                <a:effectLst/>
-                <a:latin typeface="Segoe UI Light" pitchFamily="34" charset="0"/>
-                <a:ea typeface="+mn-ea"/>
-                <a:cs typeface="+mn-cs"/>
-              </a:rPr>
-              <a:t>: This ask will run the </a:t>
-            </a:r>
-            <a:r>
-              <a:rPr lang="en-US" sz="900" b="1" kern="1200" dirty="0">
-                <a:solidFill>
-                  <a:schemeClr val="tx1"/>
-                </a:solidFill>
-                <a:effectLst/>
-                <a:latin typeface="Segoe UI Light" pitchFamily="34" charset="0"/>
-                <a:ea typeface="+mn-ea"/>
-                <a:cs typeface="+mn-cs"/>
-              </a:rPr>
-              <a:t>**build**</a:t>
-            </a:r>
-            <a:r>
-              <a:rPr lang="en-US" sz="900" b="0" kern="1200" dirty="0">
-                <a:solidFill>
-                  <a:schemeClr val="tx1"/>
-                </a:solidFill>
-                <a:effectLst/>
-                <a:latin typeface="Segoe UI Light" pitchFamily="34" charset="0"/>
-                <a:ea typeface="+mn-ea"/>
-                <a:cs typeface="+mn-cs"/>
-              </a:rPr>
-              <a:t> task and then create JavaScript bundle(s) with Webpack using the files from the build task.</a:t>
-            </a:r>
-          </a:p>
-          <a:p>
-            <a:r>
-              <a:rPr lang="en-US" sz="900" b="0" kern="1200" dirty="0">
-                <a:solidFill>
-                  <a:schemeClr val="tx1"/>
-                </a:solidFill>
-                <a:effectLst/>
-                <a:latin typeface="Segoe UI Light" pitchFamily="34" charset="0"/>
-                <a:ea typeface="+mn-ea"/>
-                <a:cs typeface="+mn-cs"/>
-              </a:rPr>
-              <a:t>- </a:t>
-            </a:r>
-            <a:r>
-              <a:rPr lang="en-US" sz="900" b="1" kern="1200" dirty="0">
-                <a:solidFill>
-                  <a:schemeClr val="tx1"/>
-                </a:solidFill>
-                <a:effectLst/>
-                <a:latin typeface="Segoe UI Light" pitchFamily="34" charset="0"/>
-                <a:ea typeface="+mn-ea"/>
-                <a:cs typeface="+mn-cs"/>
-              </a:rPr>
-              <a:t>**dev-deploy**</a:t>
-            </a:r>
-            <a:r>
-              <a:rPr lang="en-US" sz="900" b="0" kern="1200" dirty="0">
-                <a:solidFill>
-                  <a:schemeClr val="tx1"/>
-                </a:solidFill>
-                <a:effectLst/>
-                <a:latin typeface="Segoe UI Light" pitchFamily="34" charset="0"/>
-                <a:ea typeface="+mn-ea"/>
-                <a:cs typeface="+mn-cs"/>
-              </a:rPr>
-              <a:t> &amp; </a:t>
-            </a:r>
-            <a:r>
-              <a:rPr lang="en-US" sz="900" b="1" kern="1200" dirty="0">
-                <a:solidFill>
-                  <a:schemeClr val="tx1"/>
-                </a:solidFill>
-                <a:effectLst/>
-                <a:latin typeface="Segoe UI Light" pitchFamily="34" charset="0"/>
-                <a:ea typeface="+mn-ea"/>
-                <a:cs typeface="+mn-cs"/>
-              </a:rPr>
-              <a:t>**deploy-azure-storage**</a:t>
-            </a:r>
-            <a:r>
-              <a:rPr lang="en-US" sz="900" b="0" kern="1200" dirty="0">
-                <a:solidFill>
-                  <a:schemeClr val="tx1"/>
-                </a:solidFill>
-                <a:effectLst/>
-                <a:latin typeface="Segoe UI Light" pitchFamily="34" charset="0"/>
-                <a:ea typeface="+mn-ea"/>
-                <a:cs typeface="+mn-cs"/>
-              </a:rPr>
-              <a:t>: These tasks upload the production manifest and JavaScript bundles to the Azure storage blob specified in the </a:t>
-            </a:r>
-            <a:r>
-              <a:rPr lang="en-US" sz="900" b="1" kern="1200" dirty="0">
-                <a:solidFill>
-                  <a:schemeClr val="tx1"/>
-                </a:solidFill>
-                <a:effectLst/>
-                <a:latin typeface="Segoe UI Light" pitchFamily="34" charset="0"/>
-                <a:ea typeface="+mn-ea"/>
-                <a:cs typeface="+mn-cs"/>
-              </a:rPr>
-              <a:t>**./config/deploy-azure-</a:t>
-            </a:r>
-            <a:r>
-              <a:rPr lang="en-US" sz="900" b="1" kern="1200" dirty="0" err="1">
-                <a:solidFill>
-                  <a:schemeClr val="tx1"/>
-                </a:solidFill>
-                <a:effectLst/>
-                <a:latin typeface="Segoe UI Light" pitchFamily="34" charset="0"/>
-                <a:ea typeface="+mn-ea"/>
-                <a:cs typeface="+mn-cs"/>
-              </a:rPr>
-              <a:t>storage.json</a:t>
-            </a:r>
-            <a:r>
-              <a:rPr lang="en-US" sz="900" b="1" kern="1200" dirty="0">
-                <a:solidFill>
-                  <a:schemeClr val="tx1"/>
-                </a:solidFill>
-                <a:effectLst/>
-                <a:latin typeface="Segoe UI Light" pitchFamily="34" charset="0"/>
-                <a:ea typeface="+mn-ea"/>
-                <a:cs typeface="+mn-cs"/>
-              </a:rPr>
-              <a:t>**</a:t>
-            </a:r>
-            <a:r>
-              <a:rPr lang="en-US" sz="900" b="0" kern="1200" dirty="0">
-                <a:solidFill>
-                  <a:schemeClr val="tx1"/>
-                </a:solidFill>
-                <a:effectLst/>
-                <a:latin typeface="Segoe UI Light" pitchFamily="34" charset="0"/>
-                <a:ea typeface="+mn-ea"/>
-                <a:cs typeface="+mn-cs"/>
-              </a:rPr>
-              <a:t> configuration file when you've elected to use the Azure CDN to host and serve your files.</a:t>
-            </a:r>
-          </a:p>
-          <a:p>
-            <a:r>
-              <a:rPr lang="en-US" sz="900" b="0" kern="1200" dirty="0">
-                <a:solidFill>
-                  <a:schemeClr val="tx1"/>
-                </a:solidFill>
-                <a:effectLst/>
-                <a:latin typeface="Segoe UI Light" pitchFamily="34" charset="0"/>
-                <a:ea typeface="+mn-ea"/>
-                <a:cs typeface="+mn-cs"/>
-              </a:rPr>
-              <a:t>- </a:t>
-            </a:r>
-            <a:r>
-              <a:rPr lang="en-US" sz="900" b="1" kern="1200" dirty="0">
-                <a:solidFill>
-                  <a:schemeClr val="tx1"/>
-                </a:solidFill>
-                <a:effectLst/>
-                <a:latin typeface="Segoe UI Light" pitchFamily="34" charset="0"/>
-                <a:ea typeface="+mn-ea"/>
-                <a:cs typeface="+mn-cs"/>
-              </a:rPr>
-              <a:t>**package-solution**</a:t>
-            </a:r>
-            <a:r>
-              <a:rPr lang="en-US" sz="900" b="0" kern="1200" dirty="0">
-                <a:solidFill>
-                  <a:schemeClr val="tx1"/>
-                </a:solidFill>
-                <a:effectLst/>
-                <a:latin typeface="Segoe UI Light" pitchFamily="34" charset="0"/>
-                <a:ea typeface="+mn-ea"/>
-                <a:cs typeface="+mn-cs"/>
-              </a:rPr>
-              <a:t>: This task will create a </a:t>
-            </a:r>
-            <a:r>
-              <a:rPr lang="en-US" sz="900" b="1" kern="1200" dirty="0">
-                <a:solidFill>
-                  <a:schemeClr val="tx1"/>
-                </a:solidFill>
-                <a:effectLst/>
-                <a:latin typeface="Segoe UI Light" pitchFamily="34" charset="0"/>
-                <a:ea typeface="+mn-ea"/>
-                <a:cs typeface="+mn-cs"/>
-              </a:rPr>
-              <a:t>**\*.</a:t>
-            </a:r>
-            <a:r>
-              <a:rPr lang="en-US" sz="900" b="1" kern="1200" dirty="0" err="1">
-                <a:solidFill>
-                  <a:schemeClr val="tx1"/>
-                </a:solidFill>
-                <a:effectLst/>
-                <a:latin typeface="Segoe UI Light" pitchFamily="34" charset="0"/>
-                <a:ea typeface="+mn-ea"/>
-                <a:cs typeface="+mn-cs"/>
-              </a:rPr>
-              <a:t>sppkg</a:t>
-            </a:r>
-            <a:r>
-              <a:rPr lang="en-US" sz="900" b="1" kern="1200" dirty="0">
-                <a:solidFill>
-                  <a:schemeClr val="tx1"/>
-                </a:solidFill>
-                <a:effectLst/>
-                <a:latin typeface="Segoe UI Light" pitchFamily="34" charset="0"/>
-                <a:ea typeface="+mn-ea"/>
-                <a:cs typeface="+mn-cs"/>
-              </a:rPr>
-              <a:t>**</a:t>
-            </a:r>
-            <a:r>
-              <a:rPr lang="en-US" sz="900" b="0" kern="1200" dirty="0">
-                <a:solidFill>
-                  <a:schemeClr val="tx1"/>
-                </a:solidFill>
-                <a:effectLst/>
-                <a:latin typeface="Segoe UI Light" pitchFamily="34" charset="0"/>
-                <a:ea typeface="+mn-ea"/>
-                <a:cs typeface="+mn-cs"/>
-              </a:rPr>
-              <a:t> SharePoint package file using the output from the </a:t>
-            </a:r>
-            <a:r>
-              <a:rPr lang="en-US" sz="900" b="1" kern="1200" dirty="0">
-                <a:solidFill>
-                  <a:schemeClr val="tx1"/>
-                </a:solidFill>
-                <a:effectLst/>
-                <a:latin typeface="Segoe UI Light" pitchFamily="34" charset="0"/>
-                <a:ea typeface="+mn-ea"/>
-                <a:cs typeface="+mn-cs"/>
-              </a:rPr>
-              <a:t>**bundle**</a:t>
-            </a:r>
-            <a:r>
-              <a:rPr lang="en-US" sz="900" b="0" kern="1200" dirty="0">
-                <a:solidFill>
-                  <a:schemeClr val="tx1"/>
-                </a:solidFill>
-                <a:effectLst/>
-                <a:latin typeface="Segoe UI Light" pitchFamily="34" charset="0"/>
-                <a:ea typeface="+mn-ea"/>
-                <a:cs typeface="+mn-cs"/>
-              </a:rPr>
-              <a:t> task.</a:t>
-            </a:r>
-          </a:p>
-          <a:p>
             <a:pPr marL="0" marR="0" lvl="0" indent="0" algn="l" defTabSz="932742" rtl="0" eaLnBrk="1" fontAlgn="auto" latinLnBrk="0" hangingPunct="1">
               <a:lnSpc>
                 <a:spcPct val="90000"/>
@@ -1639,6 +1357,312 @@
                 <a:ea typeface="+mn-ea"/>
                 <a:cs typeface="+mn-cs"/>
               </a:rPr>
+              <a:t>**start**</a:t>
+            </a:r>
+            <a:r>
+              <a:rPr lang="en-US" sz="900" b="0" kern="1200" dirty="0">
+                <a:solidFill>
+                  <a:schemeClr val="tx1"/>
+                </a:solidFill>
+                <a:effectLst/>
+                <a:latin typeface="Segoe UI Light" pitchFamily="34" charset="0"/>
+                <a:ea typeface="+mn-ea"/>
+                <a:cs typeface="+mn-cs"/>
+              </a:rPr>
+              <a:t>: This ask will run the </a:t>
+            </a:r>
+            <a:r>
+              <a:rPr lang="en-US" sz="900" b="1" kern="1200" dirty="0">
+                <a:solidFill>
+                  <a:schemeClr val="tx1"/>
+                </a:solidFill>
+                <a:effectLst/>
+                <a:latin typeface="Segoe UI Light" pitchFamily="34" charset="0"/>
+                <a:ea typeface="+mn-ea"/>
+                <a:cs typeface="+mn-cs"/>
+              </a:rPr>
+              <a:t>**build**</a:t>
+            </a:r>
+            <a:r>
+              <a:rPr lang="en-US" sz="900" b="0" kern="1200" dirty="0">
+                <a:solidFill>
+                  <a:schemeClr val="tx1"/>
+                </a:solidFill>
+                <a:effectLst/>
+                <a:latin typeface="Segoe UI Light" pitchFamily="34" charset="0"/>
+                <a:ea typeface="+mn-ea"/>
+                <a:cs typeface="+mn-cs"/>
+              </a:rPr>
+              <a:t> task and then create JavaScript bundle(s) with Webpack using the files from the build task </a:t>
+            </a:r>
+            <a:r>
+              <a:rPr lang="en-US" b="0" dirty="0">
+                <a:solidFill>
+                  <a:srgbClr val="000000"/>
+                </a:solidFill>
+                <a:effectLst/>
+                <a:latin typeface="Consolas" panose="020B0609020204030204" pitchFamily="49" charset="0"/>
+              </a:rPr>
+              <a:t>and start the local web server.</a:t>
+            </a:r>
+            <a:endParaRPr lang="en-US" sz="900" b="0" kern="1200" dirty="0">
+              <a:solidFill>
+                <a:schemeClr val="tx1"/>
+              </a:solidFill>
+              <a:effectLst/>
+              <a:latin typeface="Segoe UI Light" pitchFamily="34" charset="0"/>
+              <a:ea typeface="+mn-ea"/>
+              <a:cs typeface="+mn-cs"/>
+            </a:endParaRPr>
+          </a:p>
+          <a:p>
+            <a:r>
+              <a:rPr lang="en-US" sz="900" b="0" kern="1200" dirty="0">
+                <a:solidFill>
+                  <a:schemeClr val="tx1"/>
+                </a:solidFill>
+                <a:effectLst/>
+                <a:latin typeface="Segoe UI Light" pitchFamily="34" charset="0"/>
+                <a:ea typeface="+mn-ea"/>
+                <a:cs typeface="+mn-cs"/>
+              </a:rPr>
+              <a:t>- </a:t>
+            </a:r>
+            <a:r>
+              <a:rPr lang="en-US" sz="900" b="1" kern="1200" dirty="0">
+                <a:solidFill>
+                  <a:schemeClr val="tx1"/>
+                </a:solidFill>
+                <a:effectLst/>
+                <a:latin typeface="Segoe UI Light" pitchFamily="34" charset="0"/>
+                <a:ea typeface="+mn-ea"/>
+                <a:cs typeface="+mn-cs"/>
+              </a:rPr>
+              <a:t>**dev-deploy**</a:t>
+            </a:r>
+            <a:r>
+              <a:rPr lang="en-US" sz="900" b="0" kern="1200" dirty="0">
+                <a:solidFill>
+                  <a:schemeClr val="tx1"/>
+                </a:solidFill>
+                <a:effectLst/>
+                <a:latin typeface="Segoe UI Light" pitchFamily="34" charset="0"/>
+                <a:ea typeface="+mn-ea"/>
+                <a:cs typeface="+mn-cs"/>
+              </a:rPr>
+              <a:t> &amp; </a:t>
+            </a:r>
+            <a:r>
+              <a:rPr lang="en-US" sz="900" b="1" kern="1200" dirty="0">
+                <a:solidFill>
+                  <a:schemeClr val="tx1"/>
+                </a:solidFill>
+                <a:effectLst/>
+                <a:latin typeface="Segoe UI Light" pitchFamily="34" charset="0"/>
+                <a:ea typeface="+mn-ea"/>
+                <a:cs typeface="+mn-cs"/>
+              </a:rPr>
+              <a:t>**deploy-azure-storage**</a:t>
+            </a:r>
+            <a:r>
+              <a:rPr lang="en-US" sz="900" b="0" kern="1200" dirty="0">
+                <a:solidFill>
+                  <a:schemeClr val="tx1"/>
+                </a:solidFill>
+                <a:effectLst/>
+                <a:latin typeface="Segoe UI Light" pitchFamily="34" charset="0"/>
+                <a:ea typeface="+mn-ea"/>
+                <a:cs typeface="+mn-cs"/>
+              </a:rPr>
+              <a:t>: These tasks upload the production manifest and JavaScript bundles to the Azure storage blob specified in the </a:t>
+            </a:r>
+            <a:r>
+              <a:rPr lang="en-US" sz="900" b="1" kern="1200" dirty="0">
+                <a:solidFill>
+                  <a:schemeClr val="tx1"/>
+                </a:solidFill>
+                <a:effectLst/>
+                <a:latin typeface="Segoe UI Light" pitchFamily="34" charset="0"/>
+                <a:ea typeface="+mn-ea"/>
+                <a:cs typeface="+mn-cs"/>
+              </a:rPr>
+              <a:t>**./config/deploy-azure-</a:t>
+            </a:r>
+            <a:r>
+              <a:rPr lang="en-US" sz="900" b="1" kern="1200" dirty="0" err="1">
+                <a:solidFill>
+                  <a:schemeClr val="tx1"/>
+                </a:solidFill>
+                <a:effectLst/>
+                <a:latin typeface="Segoe UI Light" pitchFamily="34" charset="0"/>
+                <a:ea typeface="+mn-ea"/>
+                <a:cs typeface="+mn-cs"/>
+              </a:rPr>
+              <a:t>storage.json</a:t>
+            </a:r>
+            <a:r>
+              <a:rPr lang="en-US" sz="900" b="1" kern="1200" dirty="0">
+                <a:solidFill>
+                  <a:schemeClr val="tx1"/>
+                </a:solidFill>
+                <a:effectLst/>
+                <a:latin typeface="Segoe UI Light" pitchFamily="34" charset="0"/>
+                <a:ea typeface="+mn-ea"/>
+                <a:cs typeface="+mn-cs"/>
+              </a:rPr>
+              <a:t>**</a:t>
+            </a:r>
+            <a:r>
+              <a:rPr lang="en-US" sz="900" b="0" kern="1200" dirty="0">
+                <a:solidFill>
+                  <a:schemeClr val="tx1"/>
+                </a:solidFill>
+                <a:effectLst/>
+                <a:latin typeface="Segoe UI Light" pitchFamily="34" charset="0"/>
+                <a:ea typeface="+mn-ea"/>
+                <a:cs typeface="+mn-cs"/>
+              </a:rPr>
+              <a:t> configuration file when you've elected to use the Azure CDN to host and serve your files.</a:t>
+            </a:r>
+          </a:p>
+          <a:p>
+            <a:r>
+              <a:rPr lang="en-US" sz="900" b="0" kern="1200" dirty="0">
+                <a:solidFill>
+                  <a:schemeClr val="tx1"/>
+                </a:solidFill>
+                <a:effectLst/>
+                <a:latin typeface="Segoe UI Light" pitchFamily="34" charset="0"/>
+                <a:ea typeface="+mn-ea"/>
+                <a:cs typeface="+mn-cs"/>
+              </a:rPr>
+              <a:t>- </a:t>
+            </a:r>
+            <a:r>
+              <a:rPr lang="en-US" sz="900" b="1" kern="1200" dirty="0">
+                <a:solidFill>
+                  <a:schemeClr val="tx1"/>
+                </a:solidFill>
+                <a:effectLst/>
+                <a:latin typeface="Segoe UI Light" pitchFamily="34" charset="0"/>
+                <a:ea typeface="+mn-ea"/>
+                <a:cs typeface="+mn-cs"/>
+              </a:rPr>
+              <a:t>**package-solution**</a:t>
+            </a:r>
+            <a:r>
+              <a:rPr lang="en-US" sz="900" b="0" kern="1200" dirty="0">
+                <a:solidFill>
+                  <a:schemeClr val="tx1"/>
+                </a:solidFill>
+                <a:effectLst/>
+                <a:latin typeface="Segoe UI Light" pitchFamily="34" charset="0"/>
+                <a:ea typeface="+mn-ea"/>
+                <a:cs typeface="+mn-cs"/>
+              </a:rPr>
+              <a:t>: This task will create a </a:t>
+            </a:r>
+            <a:r>
+              <a:rPr lang="en-US" sz="900" b="1" kern="1200" dirty="0">
+                <a:solidFill>
+                  <a:schemeClr val="tx1"/>
+                </a:solidFill>
+                <a:effectLst/>
+                <a:latin typeface="Segoe UI Light" pitchFamily="34" charset="0"/>
+                <a:ea typeface="+mn-ea"/>
+                <a:cs typeface="+mn-cs"/>
+              </a:rPr>
+              <a:t>**\*.</a:t>
+            </a:r>
+            <a:r>
+              <a:rPr lang="en-US" sz="900" b="1" kern="1200" dirty="0" err="1">
+                <a:solidFill>
+                  <a:schemeClr val="tx1"/>
+                </a:solidFill>
+                <a:effectLst/>
+                <a:latin typeface="Segoe UI Light" pitchFamily="34" charset="0"/>
+                <a:ea typeface="+mn-ea"/>
+                <a:cs typeface="+mn-cs"/>
+              </a:rPr>
+              <a:t>sppkg</a:t>
+            </a:r>
+            <a:r>
+              <a:rPr lang="en-US" sz="900" b="1" kern="1200" dirty="0">
+                <a:solidFill>
+                  <a:schemeClr val="tx1"/>
+                </a:solidFill>
+                <a:effectLst/>
+                <a:latin typeface="Segoe UI Light" pitchFamily="34" charset="0"/>
+                <a:ea typeface="+mn-ea"/>
+                <a:cs typeface="+mn-cs"/>
+              </a:rPr>
+              <a:t>**</a:t>
+            </a:r>
+            <a:r>
+              <a:rPr lang="en-US" sz="900" b="0" kern="1200" dirty="0">
+                <a:solidFill>
+                  <a:schemeClr val="tx1"/>
+                </a:solidFill>
+                <a:effectLst/>
+                <a:latin typeface="Segoe UI Light" pitchFamily="34" charset="0"/>
+                <a:ea typeface="+mn-ea"/>
+                <a:cs typeface="+mn-cs"/>
+              </a:rPr>
+              <a:t> SharePoint package file using the output from the </a:t>
+            </a:r>
+            <a:r>
+              <a:rPr lang="en-US" sz="900" b="1" kern="1200" dirty="0">
+                <a:solidFill>
+                  <a:schemeClr val="tx1"/>
+                </a:solidFill>
+                <a:effectLst/>
+                <a:latin typeface="Segoe UI Light" pitchFamily="34" charset="0"/>
+                <a:ea typeface="+mn-ea"/>
+                <a:cs typeface="+mn-cs"/>
+              </a:rPr>
+              <a:t>**bundle**</a:t>
+            </a:r>
+            <a:r>
+              <a:rPr lang="en-US" sz="900" b="0" kern="1200" dirty="0">
+                <a:solidFill>
+                  <a:schemeClr val="tx1"/>
+                </a:solidFill>
+                <a:effectLst/>
+                <a:latin typeface="Segoe UI Light" pitchFamily="34" charset="0"/>
+                <a:ea typeface="+mn-ea"/>
+                <a:cs typeface="+mn-cs"/>
+              </a:rPr>
+              <a:t> task.</a:t>
+            </a:r>
+          </a:p>
+          <a:p>
+            <a:pPr marL="171450" marR="0" lvl="0" indent="-171450" algn="l" defTabSz="932742" rtl="0" eaLnBrk="1" fontAlgn="auto" latinLnBrk="0" hangingPunct="1">
+              <a:lnSpc>
+                <a:spcPct val="90000"/>
+              </a:lnSpc>
+              <a:spcBef>
+                <a:spcPts val="0"/>
+              </a:spcBef>
+              <a:spcAft>
+                <a:spcPts val="340"/>
+              </a:spcAft>
+              <a:buClrTx/>
+              <a:buSzTx/>
+              <a:buFontTx/>
+              <a:buChar char="-"/>
+              <a:tabLst/>
+              <a:defRPr/>
+            </a:pPr>
+            <a:r>
+              <a:rPr lang="en-US" sz="900" b="1" kern="1200" dirty="0">
+                <a:solidFill>
+                  <a:schemeClr val="tx1"/>
+                </a:solidFill>
+                <a:effectLst/>
+                <a:latin typeface="Segoe UI Light" pitchFamily="34" charset="0"/>
+                <a:ea typeface="+mn-ea"/>
+                <a:cs typeface="+mn-cs"/>
+              </a:rPr>
               <a:t>**serve**</a:t>
             </a:r>
             <a:r>
@@ -1661,51 +1685,27 @@
                 <a:effectLst/>
                 <a:latin typeface="Consolas" panose="020B0609020204030204" pitchFamily="49" charset="0"/>
               </a:rPr>
-              <a:t>The serve task will </a:t>
-            </a:r>
-            <a:r>
-              <a:rPr lang="en-US" b="0" dirty="0" err="1">
-                <a:solidFill>
-                  <a:srgbClr val="000000"/>
-                </a:solidFill>
-                <a:effectLst/>
-                <a:latin typeface="Consolas" panose="020B0609020204030204" pitchFamily="49" charset="0"/>
-              </a:rPr>
-              <a:t>will</a:t>
-            </a:r>
-            <a:r>
-              <a:rPr lang="en-US" b="0" dirty="0">
-                <a:solidFill>
-                  <a:srgbClr val="000000"/>
-                </a:solidFill>
-                <a:effectLst/>
-                <a:latin typeface="Consolas" panose="020B0609020204030204" pitchFamily="49" charset="0"/>
-              </a:rPr>
-              <a:t> build the project and start the local web server.</a:t>
-            </a:r>
-            <a:endParaRPr lang="en-US" sz="900" b="0" kern="1200" dirty="0">
-              <a:solidFill>
-                <a:schemeClr val="tx1"/>
-              </a:solidFill>
-              <a:effectLst/>
-              <a:latin typeface="Segoe UI Light" pitchFamily="34" charset="0"/>
-              <a:ea typeface="+mn-ea"/>
-              <a:cs typeface="+mn-cs"/>
-            </a:endParaRPr>
-          </a:p>
-          <a:p>
-            <a:r>
-              <a:rPr lang="en-US" sz="900" b="0" kern="1200" dirty="0">
-                <a:solidFill>
-                  <a:schemeClr val="tx1"/>
-                </a:solidFill>
-                <a:effectLst/>
-                <a:latin typeface="Segoe UI Light" pitchFamily="34" charset="0"/>
-                <a:ea typeface="+mn-ea"/>
-                <a:cs typeface="+mn-cs"/>
-              </a:rPr>
-              <a:t>- </a:t>
-            </a:r>
+              <a:t>The serve task will will build the project </a:t>
+            </a:r>
+          </a:p>
+          <a:p>
+            <a:pPr marL="171450" marR="0" lvl="0" indent="-171450" algn="l" defTabSz="932742" rtl="0" eaLnBrk="1" fontAlgn="auto" latinLnBrk="0" hangingPunct="1">
+              <a:lnSpc>
+                <a:spcPct val="90000"/>
+              </a:lnSpc>
+              <a:spcBef>
+                <a:spcPts val="0"/>
+              </a:spcBef>
+              <a:spcAft>
+                <a:spcPts val="340"/>
+              </a:spcAft>
+              <a:buClrTx/>
+              <a:buSzTx/>
+              <a:buFontTx/>
+              <a:buChar char="-"/>
+              <a:tabLst/>
+              <a:defRPr/>
+            </a:pPr>
             <a:r>
               <a:rPr lang="en-US" sz="900" b="1" kern="1200" dirty="0">
                 <a:solidFill>
@@ -2010,7 +2010,7 @@
           <a:p>
             <a:fld id="{D18B56EA-E28F-4F92-9F16-7A6F2501B303}" type="datetime8">
               <a:rPr lang="en-US" smtClean="0"/>
-              <a:t>11/8/2022 9:40 AM</a:t>
+              <a:t>5/24/26 7:51 PM</a:t>
             </a:fld>
             <a:endParaRPr lang="en-US" dirty="0"/>
           </a:p>
@@ -2788,7 +2788,7 @@
           <a:p>
             <a:fld id="{D18B56EA-E28F-4F92-9F16-7A6F2501B303}" type="datetime8">
               <a:rPr lang="en-US" smtClean="0"/>
-              <a:t>11/8/2022 9:40 AM</a:t>
+              <a:t>5/24/26 7:51 PM</a:t>
             </a:fld>
             <a:endParaRPr lang="en-US" dirty="0"/>
           </a:p>
@@ -2969,7 +2969,7 @@
           <a:p>
             <a:fld id="{D18B56EA-E28F-4F92-9F16-7A6F2501B303}" type="datetime8">
               <a:rPr lang="en-US" smtClean="0"/>
-              <a:t>11/8/2022 9:40 AM</a:t>
+              <a:t>5/24/26 7:51 PM</a:t>
             </a:fld>
             <a:endParaRPr lang="en-US" dirty="0"/>
           </a:p>
@@ -3150,7 +3150,7 @@
           <a:p>
             <a:fld id="{D18B56EA-E28F-4F92-9F16-7A6F2501B303}" type="datetime8">
               <a:rPr lang="en-US" smtClean="0"/>
-              <a:t>11/8/2022 9:40 AM</a:t>
+              <a:t>5/24/26 7:51 PM</a:t>
             </a:fld>
             <a:endParaRPr lang="en-US" dirty="0"/>
           </a:p>
@@ -3331,7 +3331,7 @@
           <a:p>
             <a:fld id="{D18B56EA-E28F-4F92-9F16-7A6F2501B303}" type="datetime8">
               <a:rPr lang="en-US" smtClean="0"/>
-              <a:t>11/8/2022 9:40 AM</a:t>
+              <a:t>5/24/26 7:51 PM</a:t>
             </a:fld>
             <a:endParaRPr lang="en-US" dirty="0"/>
           </a:p>
@@ -3512,7 +3512,7 @@
           <a:p>
             <a:fld id="{D18B56EA-E28F-4F92-9F16-7A6F2501B303}" type="datetime8">
               <a:rPr lang="en-US" smtClean="0"/>
-              <a:t>11/8/2022 9:40 AM</a:t>
+              <a:t>5/24/26 7:51 PM</a:t>
             </a:fld>
             <a:endParaRPr lang="en-US" dirty="0"/>
           </a:p>
@@ -3696,7 +3696,7 @@
           <a:p>
             <a:fld id="{D18B56EA-E28F-4F92-9F16-7A6F2501B303}" type="datetime8">
               <a:rPr lang="en-US" smtClean="0"/>
-              <a:t>11/8/2022 9:40 AM</a:t>
+              <a:t>5/24/26 7:51 PM</a:t>
             </a:fld>
             <a:endParaRPr lang="en-US" dirty="0"/>
           </a:p>
@@ -4892,7 +4892,7 @@
           <a:p>
             <a:fld id="{D18B56EA-E28F-4F92-9F16-7A6F2501B303}" type="datetime8">
               <a:rPr lang="en-US" smtClean="0"/>
-              <a:t>11/8/2022 9:40 AM</a:t>
+              <a:t>5/24/26 7:51 PM</a:t>
             </a:fld>
             <a:endParaRPr lang="en-US" dirty="0"/>
           </a:p>
@@ -5477,7 +5477,15 @@
           <a:p>
             <a:r>
               <a:rPr lang="en-US" dirty="0"/>
-              <a:t>Moving onto the second column, test your component in the hosted workbench by executing the command `gulp serve` from the command line from the root folder of the project. This task will build, bundle, start the local web server, launch the default browser, and navigate to the workbench. Here you can add your web part to the workbench's page to test it. The hosted workbench will load the component from your local web server in the browser.</a:t>
+              <a:t>Moving onto the second column, test your component in the hosted workbench by executing the command `heft </a:t>
+            </a:r>
+            <a:r>
+              <a:rPr lang="en-US" dirty="0" err="1"/>
+              <a:t>starst</a:t>
+            </a:r>
+            <a:r>
+              <a:rPr lang="en-US" dirty="0"/>
+              <a:t>` from the command line from the root folder of the project. This task will build, bundle, start the local web server, launch the default browser, and navigate to a SharePoint page. Here you can add your web part to the workbench's page to test it. The SharePoint page will load the component from your local web server in the browser.</a:t>
             </a:r>
           </a:p>
           <a:p>
@@ -5495,7 +5503,7 @@
           <a:p>
             <a:r>
               <a:rPr lang="en-US" dirty="0"/>
-              <a:t>The third column represents the deployment process. You'll first re-bundle the component using the `gulp bundle --ship` command that recreates the bundle for production. Next, create the deployable SharePoint package using the `gulp package-solution --ship` command. This command generates the **\*.</a:t>
+              <a:t>The third column represents the deployment process. You'll first re-bundle the component using the `heft build --production` command that recreates the bundle for production. Next, create the deployable SharePoint package using the `heft package-solution --production` command. This command generates the **\*.</a:t>
             </a:r>
             <a:r>
               <a:rPr lang="en-US" dirty="0" err="1"/>
@@ -5611,7 +5619,7 @@
           <a:p>
             <a:fld id="{D18B56EA-E28F-4F92-9F16-7A6F2501B303}" type="datetime8">
               <a:rPr lang="en-US" smtClean="0"/>
-              <a:t>11/8/2022 9:40 AM</a:t>
+              <a:t>5/24/26 7:51 PM</a:t>
             </a:fld>
             <a:endParaRPr lang="en-US" dirty="0"/>
           </a:p>
@@ -18504,7 +18512,7 @@
         <p:spPr>
           <a:xfrm>
             <a:off x="274638" y="1212850"/>
-            <a:ext cx="11887200" cy="4838248"/>
+            <a:ext cx="11887200" cy="4025717"/>
           </a:xfrm>
         </p:spPr>
         <p:txBody>
@@ -18542,24 +18550,8 @@
           </a:p>
           <a:p>
             <a:r>
-              <a:rPr lang="en-US" sz="2400" dirty="0"/>
-              <a:t>build: build the project</a:t>
-            </a:r>
-          </a:p>
-          <a:p>
-            <a:r>
               <a:rPr lang="en-US" sz="2400" b="1" dirty="0"/>
-              <a:t>default</a:t>
-            </a:r>
-            <a:r>
-              <a:rPr lang="en-US" sz="2400" dirty="0"/>
-              <a:t>: equivalent to bundle</a:t>
-            </a:r>
-          </a:p>
-          <a:p>
-            <a:r>
-              <a:rPr lang="en-US" sz="2400" b="1" dirty="0"/>
-              <a:t>bundle</a:t>
+              <a:t>build</a:t>
             </a:r>
             <a:r>
               <a:rPr lang="en-US" sz="2400" dirty="0"/>
@@ -18622,7 +18614,7 @@
           <a:p>
             <a:r>
               <a:rPr lang="en-US" sz="2400" b="1" dirty="0"/>
-              <a:t>serve</a:t>
+              <a:t>start</a:t>
             </a:r>
             <a:r>
               <a:rPr lang="en-US" sz="2400" dirty="0"/>
@@ -18671,21 +18663,32 @@
             <p:ph type="title"/>
           </p:nvPr>
         </p:nvSpPr>
-        <p:spPr/>
+        <p:spPr>
+          <a:xfrm>
+            <a:off x="464400" y="633600"/>
+            <a:ext cx="11574000" cy="387798"/>
+          </a:xfrm>
+        </p:spPr>
         <p:txBody>
           <a:bodyPr/>
           <a:lstStyle/>
           <a:p>
             <a:r>
-              <a:rPr lang="en-US"/>
-              <a:t>What the Gulp tasks do</a:t>
+              <a:rPr lang="en-US" dirty="0"/>
+              <a:t>What the Heft tasks do</a:t>
             </a:r>
           </a:p>
         </p:txBody>
       </p:sp>
       <p:pic>
         <p:nvPicPr>
-          <p:cNvPr id="5" name="Picture 4"/>
+          <p:cNvPr id="4" name="Picture 3">
+            <a:extLst>
+              <a:ext uri="{FF2B5EF4-FFF2-40B4-BE49-F238E27FC236}">
+                <a16:creationId xmlns:a16="http://schemas.microsoft.com/office/drawing/2014/main" id="{3D32339E-CBB4-71E3-4F17-704776760AF1}"/>
+              </a:ext>
+            </a:extLst>
+          </p:cNvPr>
           <p:cNvPicPr>
             <a:picLocks noChangeAspect="1"/>
           </p:cNvPicPr>
@@ -18699,8 +18702,8 @@
         </p:blipFill>
         <p:spPr>
           <a:xfrm>
-            <a:off x="11171239" y="99756"/>
-            <a:ext cx="990600" cy="2226188"/>
+            <a:off x="10585838" y="101218"/>
+            <a:ext cx="1452562" cy="1452562"/>
           </a:xfrm>
           <a:prstGeom prst="rect">
             <a:avLst/>
@@ -18720,92 +18723,6 @@
   <p:transition>
     <p:fade/>
   </p:transition>
-  <p:timing>
-    <p:tnLst>
-      <p:par>
-        <p:cTn id="1" dur="indefinite" restart="never" nodeType="tmRoot">
-          <p:childTnLst>
-            <p:seq concurrent="1" nextAc="seek">
-              <p:cTn id="2" dur="indefinite" nodeType="mainSeq">
-                <p:childTnLst>
-                  <p:par>
-                    <p:cTn id="3" fill="hold">
-                      <p:stCondLst>
-                        <p:cond delay="indefinite"/>
-                        <p:cond evt="onBegin" delay="0">
-                          <p:tn val="2"/>
-                        </p:cond>
-                      </p:stCondLst>
-                      <p:childTnLst>
-                        <p:par>
-                          <p:cTn id="4" fill="hold">
-                            <p:stCondLst>
-                              <p:cond delay="0"/>
-                            </p:stCondLst>
-                            <p:childTnLst>
-                              <p:par>
-                                <p:cTn id="5" presetID="10" presetClass="entr" presetSubtype="0" fill="hold" nodeType="afterEffect">
-                                  <p:stCondLst>
-                                    <p:cond delay="250"/>
-                                  </p:stCondLst>
-                                  <p:childTnLst>
-                                    <p:set>
-                                      <p:cBhvr>
-                                        <p:cTn id="6" dur="1" fill="hold">
-                                          <p:stCondLst>
-                                            <p:cond delay="0"/>
-                                          </p:stCondLst>
-                                        </p:cTn>
-                                        <p:tgtEl>
-                                          <p:spTgt spid="5"/>
-                                        </p:tgtEl>
-                                        <p:attrNameLst>
-                                          <p:attrName>style.visibility</p:attrName>
-                                        </p:attrNameLst>
-                                      </p:cBhvr>
-                                      <p:to>
-                                        <p:strVal val="visible"/>
-                                      </p:to>
-                                    </p:set>
-                                    <p:animEffect transition="in" filter="fade">
-                                      <p:cBhvr>
-                                        <p:cTn id="7" dur="500"/>
-                                        <p:tgtEl>
-                                          <p:spTgt spid="5"/>
-                                        </p:tgtEl>
-                                      </p:cBhvr>
-                                    </p:animEffect>
-                                  </p:childTnLst>
-                                </p:cTn>
-                              </p:par>
-                            </p:childTnLst>
-                          </p:cTn>
-                        </p:par>
-                      </p:childTnLst>
-                    </p:cTn>
-                  </p:par>
-                </p:childTnLst>
-              </p:cTn>
-              <p:prevCondLst>
-                <p:cond evt="onPrev" delay="0">
-                  <p:tgtEl>
-                    <p:sldTgt/>
-                  </p:tgtEl>
-                </p:cond>
-              </p:prevCondLst>
-              <p:nextCondLst>
-                <p:cond evt="onNext" delay="0">
-                  <p:tgtEl>
-                    <p:sldTgt/>
-                  </p:tgtEl>
-                </p:cond>
-              </p:nextCondLst>
-            </p:seq>
-          </p:childTnLst>
-        </p:cTn>
-      </p:par>
-    </p:tnLst>
-  </p:timing>
 </p:sld>
 </file>
 
@@ -18848,7 +18765,7 @@
           <a:p>
             <a:r>
               <a:rPr lang="en-US" dirty="0"/>
-              <a:t>Gulp tasks package solutions</a:t>
+              <a:t>Heft tasks package solutions</a:t>
             </a:r>
           </a:p>
           <a:p>
@@ -18982,7 +18899,7 @@
               </a:spcAft>
             </a:pPr>
             <a:r>
-              <a:rPr lang="en-US" sz="2000">
+              <a:rPr lang="en-US" sz="2000" dirty="0">
                 <a:gradFill>
                   <a:gsLst>
                     <a:gs pos="0">
@@ -18996,9 +18913,9 @@
                 </a:gradFill>
                 <a:latin typeface="Consolas" panose="020B0609020204030204" pitchFamily="49" charset="0"/>
               </a:rPr>
-              <a:t>&gt; gulp package-solution</a:t>
-            </a:r>
-            <a:endParaRPr lang="fi-FI" sz="2000">
+              <a:t>&gt; heft package-solution</a:t>
+            </a:r>
+            <a:endParaRPr lang="fi-FI" sz="2000" dirty="0">
               <a:gradFill>
                 <a:gsLst>
                   <a:gs pos="0">
@@ -23353,36 +23270,6 @@
           <a:chExt cx="0" cy="0"/>
         </a:xfrm>
       </p:grpSpPr>
-      <p:pic>
-        <p:nvPicPr>
-          <p:cNvPr id="6" name="Picture 5" descr="Graphical user interface, application&#10;&#10;Description automatically generated">
-            <a:extLst>
-              <a:ext uri="{FF2B5EF4-FFF2-40B4-BE49-F238E27FC236}">
-                <a16:creationId xmlns:a16="http://schemas.microsoft.com/office/drawing/2014/main" id="{A7252806-FD44-BA00-596E-03EE0C962138}"/>
-              </a:ext>
-            </a:extLst>
-          </p:cNvPr>
-          <p:cNvPicPr>
-            <a:picLocks noChangeAspect="1"/>
-          </p:cNvPicPr>
-          <p:nvPr/>
-        </p:nvPicPr>
-        <p:blipFill>
-          <a:blip r:embed="rId3"/>
-          <a:stretch>
-            <a:fillRect/>
-          </a:stretch>
-        </p:blipFill>
-        <p:spPr>
-          <a:xfrm>
-            <a:off x="8769355" y="1212849"/>
-            <a:ext cx="2648287" cy="5395221"/>
-          </a:xfrm>
-          <a:prstGeom prst="rect">
-            <a:avLst/>
-          </a:prstGeom>
-        </p:spPr>
-      </p:pic>
       <p:sp>
         <p:nvSpPr>
           <p:cNvPr id="4" name="Text Placeholder 3"/>
@@ -23396,7 +23283,7 @@
         <p:spPr>
           <a:xfrm>
             <a:off x="464400" y="1212850"/>
-            <a:ext cx="7746346" cy="5687711"/>
+            <a:ext cx="7746346" cy="5761577"/>
           </a:xfrm>
         </p:spPr>
         <p:txBody>
@@ -23429,7 +23316,7 @@
             </a:r>
             <a:r>
               <a:rPr lang="en-US" dirty="0"/>
-              <a:t>contains Visual Studio Code integration files</a:t>
+              <a:t>contains VS Code integration files</a:t>
             </a:r>
           </a:p>
           <a:p>
@@ -23475,7 +23362,35 @@
                   <a:schemeClr val="accent1"/>
                 </a:solidFill>
               </a:rPr>
-              <a:t>lib:</a:t>
+              <a:t>lib </a:t>
+            </a:r>
+            <a:r>
+              <a:rPr lang="en-US" dirty="0"/>
+              <a:t>&amp; </a:t>
+            </a:r>
+            <a:r>
+              <a:rPr lang="en-US" dirty="0">
+                <a:solidFill>
+                  <a:schemeClr val="accent1"/>
+                </a:solidFill>
+              </a:rPr>
+              <a:t>lib-</a:t>
+            </a:r>
+            <a:r>
+              <a:rPr lang="en-US" dirty="0" err="1">
+                <a:solidFill>
+                  <a:schemeClr val="accent1"/>
+                </a:solidFill>
+              </a:rPr>
+              <a:t>commonjs</a:t>
+            </a:r>
+            <a:r>
+              <a:rPr lang="en-US" dirty="0">
+                <a:solidFill>
+                  <a:schemeClr val="accent1"/>
+                </a:solidFill>
+              </a:rPr>
+              <a:t>:</a:t>
             </a:r>
             <a:r>
               <a:rPr lang="en-US" dirty="0"/>
@@ -23538,6 +23453,20 @@
             <a:r>
               <a:rPr lang="en-US" dirty="0"/>
               <a:t> this is the main folder of the project, it includes the web part, styles, and a test file</a:t>
+            </a:r>
+          </a:p>
+          <a:p>
+            <a:r>
+              <a:rPr lang="en-US" dirty="0">
+                <a:solidFill>
+                  <a:schemeClr val="accent1"/>
+                </a:solidFill>
+              </a:rPr>
+              <a:t>teams: </a:t>
+            </a:r>
+            <a:r>
+              <a:rPr lang="en-US" dirty="0"/>
+              <a:t>images for a possible Teams app</a:t>
             </a:r>
           </a:p>
           <a:p>
@@ -23579,6 +23508,37 @@
           </a:p>
         </p:txBody>
       </p:sp>
+      <p:pic>
+        <p:nvPicPr>
+          <p:cNvPr id="5" name="Picture 4">
+            <a:extLst>
+              <a:ext uri="{FF2B5EF4-FFF2-40B4-BE49-F238E27FC236}">
+                <a16:creationId xmlns:a16="http://schemas.microsoft.com/office/drawing/2014/main" id="{29B65E5B-CAF9-6D93-F8C0-C80E8C72A37B}"/>
+              </a:ext>
+            </a:extLst>
+          </p:cNvPr>
+          <p:cNvPicPr>
+            <a:picLocks noChangeAspect="1"/>
+          </p:cNvPicPr>
+          <p:nvPr/>
+        </p:nvPicPr>
+        <p:blipFill>
+          <a:blip r:embed="rId3"/>
+          <a:srcRect t="5342"/>
+          <a:stretch>
+            <a:fillRect/>
+          </a:stretch>
+        </p:blipFill>
+        <p:spPr>
+          <a:xfrm>
+            <a:off x="8449507" y="186832"/>
+            <a:ext cx="3522568" cy="6620859"/>
+          </a:xfrm>
+          <a:prstGeom prst="rect">
+            <a:avLst/>
+          </a:prstGeom>
+        </p:spPr>
+      </p:pic>
     </p:spTree>
     <p:extLst>
       <p:ext uri="{BB962C8B-B14F-4D97-AF65-F5344CB8AC3E}">
@@ -23612,36 +23572,6 @@
           <a:chExt cx="0" cy="0"/>
         </a:xfrm>
       </p:grpSpPr>
-      <p:pic>
-        <p:nvPicPr>
-          <p:cNvPr id="6" name="Picture 5" descr="Graphical user interface, application&#10;&#10;Description automatically generated">
-            <a:extLst>
-              <a:ext uri="{FF2B5EF4-FFF2-40B4-BE49-F238E27FC236}">
-                <a16:creationId xmlns:a16="http://schemas.microsoft.com/office/drawing/2014/main" id="{A04B0441-62F7-5BE8-F2B4-F78AA77E1484}"/>
-              </a:ext>
-            </a:extLst>
-          </p:cNvPr>
-          <p:cNvPicPr>
-            <a:picLocks noChangeAspect="1"/>
-          </p:cNvPicPr>
-          <p:nvPr/>
-        </p:nvPicPr>
-        <p:blipFill>
-          <a:blip r:embed="rId3"/>
-          <a:stretch>
-            <a:fillRect/>
-          </a:stretch>
-        </p:blipFill>
-        <p:spPr>
-          <a:xfrm>
-            <a:off x="8481019" y="498413"/>
-            <a:ext cx="2986049" cy="6083325"/>
-          </a:xfrm>
-          <a:prstGeom prst="rect">
-            <a:avLst/>
-          </a:prstGeom>
-        </p:spPr>
-      </p:pic>
       <p:sp>
         <p:nvSpPr>
           <p:cNvPr id="2" name="Text Placeholder 1"/>
@@ -23749,7 +23679,7 @@
           <p:nvPr/>
         </p:nvPicPr>
         <p:blipFill>
-          <a:blip r:embed="rId4"/>
+          <a:blip r:embed="rId3"/>
           <a:stretch>
             <a:fillRect/>
           </a:stretch>
@@ -23769,6 +23699,37 @@
               </a:schemeClr>
             </a:solidFill>
           </a:ln>
+        </p:spPr>
+      </p:pic>
+      <p:pic>
+        <p:nvPicPr>
+          <p:cNvPr id="4" name="Picture 3">
+            <a:extLst>
+              <a:ext uri="{FF2B5EF4-FFF2-40B4-BE49-F238E27FC236}">
+                <a16:creationId xmlns:a16="http://schemas.microsoft.com/office/drawing/2014/main" id="{ACA3D531-7617-DB31-137C-035258E1929F}"/>
+              </a:ext>
+            </a:extLst>
+          </p:cNvPr>
+          <p:cNvPicPr>
+            <a:picLocks noChangeAspect="1"/>
+          </p:cNvPicPr>
+          <p:nvPr/>
+        </p:nvPicPr>
+        <p:blipFill>
+          <a:blip r:embed="rId4"/>
+          <a:srcRect t="5342"/>
+          <a:stretch>
+            <a:fillRect/>
+          </a:stretch>
+        </p:blipFill>
+        <p:spPr>
+          <a:xfrm>
+            <a:off x="8449507" y="186832"/>
+            <a:ext cx="3522568" cy="6620859"/>
+          </a:xfrm>
+          <a:prstGeom prst="rect">
+            <a:avLst/>
+          </a:prstGeom>
         </p:spPr>
       </p:pic>
     </p:spTree>
@@ -23806,36 +23767,6 @@
       </p:grpSpPr>
       <p:pic>
         <p:nvPicPr>
-          <p:cNvPr id="6" name="Picture 5" descr="Graphical user interface, application&#10;&#10;Description automatically generated">
-            <a:extLst>
-              <a:ext uri="{FF2B5EF4-FFF2-40B4-BE49-F238E27FC236}">
-                <a16:creationId xmlns:a16="http://schemas.microsoft.com/office/drawing/2014/main" id="{83E10DAD-1693-2F53-0DE6-18D8606DEC55}"/>
-              </a:ext>
-            </a:extLst>
-          </p:cNvPr>
-          <p:cNvPicPr>
-            <a:picLocks noChangeAspect="1"/>
-          </p:cNvPicPr>
-          <p:nvPr/>
-        </p:nvPicPr>
-        <p:blipFill>
-          <a:blip r:embed="rId3"/>
-          <a:stretch>
-            <a:fillRect/>
-          </a:stretch>
-        </p:blipFill>
-        <p:spPr>
-          <a:xfrm>
-            <a:off x="8159744" y="711815"/>
-            <a:ext cx="2944016" cy="5997696"/>
-          </a:xfrm>
-          <a:prstGeom prst="rect">
-            <a:avLst/>
-          </a:prstGeom>
-        </p:spPr>
-      </p:pic>
-      <p:pic>
-        <p:nvPicPr>
           <p:cNvPr id="9" name="Picture 8">
             <a:extLst>
               <a:ext uri="{FF2B5EF4-FFF2-40B4-BE49-F238E27FC236}">
@@ -23849,7 +23780,7 @@
           <p:nvPr/>
         </p:nvPicPr>
         <p:blipFill>
-          <a:blip r:embed="rId4"/>
+          <a:blip r:embed="rId3"/>
           <a:stretch>
             <a:fillRect/>
           </a:stretch>
@@ -23908,6 +23839,37 @@
           </a:p>
         </p:txBody>
       </p:sp>
+      <p:pic>
+        <p:nvPicPr>
+          <p:cNvPr id="4" name="Picture 3">
+            <a:extLst>
+              <a:ext uri="{FF2B5EF4-FFF2-40B4-BE49-F238E27FC236}">
+                <a16:creationId xmlns:a16="http://schemas.microsoft.com/office/drawing/2014/main" id="{D675D824-CA34-894C-C8D0-E95FA454A46E}"/>
+              </a:ext>
+            </a:extLst>
+          </p:cNvPr>
+          <p:cNvPicPr>
+            <a:picLocks noChangeAspect="1"/>
+          </p:cNvPicPr>
+          <p:nvPr/>
+        </p:nvPicPr>
+        <p:blipFill>
+          <a:blip r:embed="rId4"/>
+          <a:srcRect t="5342"/>
+          <a:stretch>
+            <a:fillRect/>
+          </a:stretch>
+        </p:blipFill>
+        <p:spPr>
+          <a:xfrm>
+            <a:off x="8449507" y="186832"/>
+            <a:ext cx="3522568" cy="6620859"/>
+          </a:xfrm>
+          <a:prstGeom prst="rect">
+            <a:avLst/>
+          </a:prstGeom>
+        </p:spPr>
+      </p:pic>
     </p:spTree>
     <p:extLst>
       <p:ext uri="{BB962C8B-B14F-4D97-AF65-F5344CB8AC3E}">
@@ -24116,36 +24078,6 @@
           <a:chExt cx="0" cy="0"/>
         </a:xfrm>
       </p:grpSpPr>
-      <p:pic>
-        <p:nvPicPr>
-          <p:cNvPr id="5" name="Picture 4" descr="Graphical user interface, application&#10;&#10;Description automatically generated">
-            <a:extLst>
-              <a:ext uri="{FF2B5EF4-FFF2-40B4-BE49-F238E27FC236}">
-                <a16:creationId xmlns:a16="http://schemas.microsoft.com/office/drawing/2014/main" id="{E5BC5855-95E1-F625-135B-EAE70E9F6F59}"/>
-              </a:ext>
-            </a:extLst>
-          </p:cNvPr>
-          <p:cNvPicPr>
-            <a:picLocks noChangeAspect="1"/>
-          </p:cNvPicPr>
-          <p:nvPr/>
-        </p:nvPicPr>
-        <p:blipFill>
-          <a:blip r:embed="rId3"/>
-          <a:stretch>
-            <a:fillRect/>
-          </a:stretch>
-        </p:blipFill>
-        <p:spPr>
-          <a:xfrm>
-            <a:off x="8558124" y="606424"/>
-            <a:ext cx="2824643" cy="5754501"/>
-          </a:xfrm>
-          <a:prstGeom prst="rect">
-            <a:avLst/>
-          </a:prstGeom>
-        </p:spPr>
-      </p:pic>
       <p:sp>
         <p:nvSpPr>
           <p:cNvPr id="2" name="Text Placeholder 1"/>
@@ -24205,7 +24137,7 @@
           <p:nvPr/>
         </p:nvPicPr>
         <p:blipFill>
-          <a:blip r:embed="rId4"/>
+          <a:blip r:embed="rId3"/>
           <a:stretch>
             <a:fillRect/>
           </a:stretch>
@@ -24214,6 +24146,37 @@
           <a:xfrm>
             <a:off x="464400" y="1988771"/>
             <a:ext cx="7850193" cy="3792904"/>
+          </a:xfrm>
+          <a:prstGeom prst="rect">
+            <a:avLst/>
+          </a:prstGeom>
+        </p:spPr>
+      </p:pic>
+      <p:pic>
+        <p:nvPicPr>
+          <p:cNvPr id="4" name="Picture 3">
+            <a:extLst>
+              <a:ext uri="{FF2B5EF4-FFF2-40B4-BE49-F238E27FC236}">
+                <a16:creationId xmlns:a16="http://schemas.microsoft.com/office/drawing/2014/main" id="{89B0D906-CFB7-802B-FCBA-515651A2C563}"/>
+              </a:ext>
+            </a:extLst>
+          </p:cNvPr>
+          <p:cNvPicPr>
+            <a:picLocks noChangeAspect="1"/>
+          </p:cNvPicPr>
+          <p:nvPr/>
+        </p:nvPicPr>
+        <p:blipFill>
+          <a:blip r:embed="rId4"/>
+          <a:srcRect t="5342"/>
+          <a:stretch>
+            <a:fillRect/>
+          </a:stretch>
+        </p:blipFill>
+        <p:spPr>
+          <a:xfrm>
+            <a:off x="8449507" y="186832"/>
+            <a:ext cx="3522568" cy="6620859"/>
           </a:xfrm>
           <a:prstGeom prst="rect">
             <a:avLst/>
@@ -24335,10 +24298,10 @@
       </p:pic>
       <p:pic>
         <p:nvPicPr>
-          <p:cNvPr id="11" name="Picture 10">
+          <p:cNvPr id="6" name="Picture 5">
             <a:extLst>
               <a:ext uri="{FF2B5EF4-FFF2-40B4-BE49-F238E27FC236}">
-                <a16:creationId xmlns:a16="http://schemas.microsoft.com/office/drawing/2014/main" id="{511F48A5-09B5-4B93-80BF-17B3B2EDCC6A}"/>
+                <a16:creationId xmlns:a16="http://schemas.microsoft.com/office/drawing/2014/main" id="{435504FB-7450-97FF-3429-2A5276CB7387}"/>
               </a:ext>
             </a:extLst>
           </p:cNvPr>
@@ -24355,8 +24318,8 @@
         </p:blipFill>
         <p:spPr>
           <a:xfrm>
-            <a:off x="1033424" y="2723153"/>
-            <a:ext cx="3799966" cy="3895995"/>
+            <a:off x="1003007" y="2948314"/>
+            <a:ext cx="3860800" cy="3441700"/>
           </a:xfrm>
           <a:prstGeom prst="rect">
             <a:avLst/>
@@ -25421,7 +25384,39 @@
                   <a:lin ang="5400000" scaled="0"/>
                 </a:gradFill>
               </a:rPr>
-              <a:t> install @Microsoft/generator-</a:t>
+              <a:t> install @</a:t>
+            </a:r>
+            <a:r>
+              <a:rPr lang="en-US" sz="1100" spc="-30" dirty="0" err="1">
+                <a:gradFill>
+                  <a:gsLst>
+                    <a:gs pos="1250">
+                      <a:schemeClr val="tx1"/>
+                    </a:gs>
+                    <a:gs pos="100000">
+                      <a:schemeClr val="tx1"/>
+                    </a:gs>
+                  </a:gsLst>
+                  <a:lin ang="5400000" scaled="0"/>
+                </a:gradFill>
+              </a:rPr>
+              <a:t>microsoft</a:t>
+            </a:r>
+            <a:r>
+              <a:rPr lang="en-US" sz="1100" spc="-30" dirty="0">
+                <a:gradFill>
+                  <a:gsLst>
+                    <a:gs pos="1250">
+                      <a:schemeClr val="tx1"/>
+                    </a:gs>
+                    <a:gs pos="100000">
+                      <a:schemeClr val="tx1"/>
+                    </a:gs>
+                  </a:gsLst>
+                  <a:lin ang="5400000" scaled="0"/>
+                </a:gradFill>
+              </a:rPr>
+              <a:t>/generator-</a:t>
             </a:r>
             <a:r>
               <a:rPr lang="en-US" sz="1100" spc="-30" dirty="0" err="1">
@@ -25652,7 +25647,7 @@
           <a:lstStyle/>
           <a:p>
             <a:r>
-              <a:rPr lang="en-US" sz="1100">
+              <a:rPr lang="en-US" sz="1100" dirty="0">
                 <a:gradFill>
                   <a:gsLst>
                     <a:gs pos="1250">
@@ -25665,7 +25660,7 @@
                   <a:lin ang="5400000" scaled="0"/>
                 </a:gradFill>
               </a:rPr>
-              <a:t>gulp serve</a:t>
+              <a:t>heft start</a:t>
             </a:r>
           </a:p>
         </p:txBody>
@@ -25710,7 +25705,7 @@
                   <a:lin ang="5400000" scaled="0"/>
                 </a:gradFill>
               </a:rPr>
-              <a:t>workbench</a:t>
+              <a:t>SharePoint page</a:t>
             </a:r>
           </a:p>
         </p:txBody>
@@ -25721,14 +25716,13 @@
           <p:cNvCxnSpPr>
             <a:cxnSpLocks/>
             <a:stCxn id="11" idx="2"/>
-            <a:endCxn id="34" idx="2"/>
           </p:cNvCxnSpPr>
           <p:nvPr/>
         </p:nvCxnSpPr>
         <p:spPr>
-          <a:xfrm>
-            <a:off x="9791922" y="2439199"/>
-            <a:ext cx="0" cy="405910"/>
+          <a:xfrm flipH="1">
+            <a:off x="9780116" y="2439199"/>
+            <a:ext cx="11806" cy="403341"/>
           </a:xfrm>
           <a:prstGeom prst="straightConnector1">
             <a:avLst/>
@@ -25798,7 +25792,7 @@
                   <a:lin ang="5400000" scaled="0"/>
                 </a:gradFill>
               </a:rPr>
-              <a:t>gulp bundle --ship</a:t>
+              <a:t>heft build --production</a:t>
             </a:r>
           </a:p>
         </p:txBody>
@@ -25812,7 +25806,7 @@
         <p:spPr>
           <a:xfrm>
             <a:off x="8747170" y="2606471"/>
-            <a:ext cx="2089504" cy="238638"/>
+            <a:ext cx="2315782" cy="238638"/>
           </a:xfrm>
           <a:prstGeom prst="rect">
             <a:avLst/>
@@ -25850,7 +25844,7 @@
           <a:p>
             <a:r>
               <a:rPr lang="en-US" dirty="0"/>
-              <a:t>gulp package-solution --ship</a:t>
+              <a:t>heft package-solution --production</a:t>
             </a:r>
           </a:p>
           <a:p>
